--- a/assets/companions/what-would-you-build-instead.pptx
+++ b/assets/companions/what-would-you-build-instead.pptx
@@ -2582,150 +2582,261 @@
           <a:chExt cx="0" cy="0"/>
         </a:xfrm>
       </p:grpSpPr>
-      <p:sp>
-        <p:nvSpPr>
-          <p:cNvPr id="2" name="Text 0"/>
-          <p:cNvSpPr txBox="1"/>
-          <p:nvPr/>
-        </p:nvSpPr>
-        <p:spPr>
-          <a:xfrm>
-            <a:off x="621792" y="658368"/>
-            <a:ext cx="6400800" cy="310896"/>
-          </a:xfrm>
-          <a:prstGeom prst="rect">
-            <a:avLst/>
-          </a:prstGeom>
-          <a:noFill/>
-          <a:ln/>
-        </p:spPr>
-        <p:txBody>
-          <a:bodyPr wrap="square" lIns="0" tIns="0" rIns="0" bIns="0" rtlCol="0" anchor="ctr"/>
-          <a:lstStyle/>
-          <a:p>
-            <a:pPr indent="0" marL="0">
-              <a:buNone/>
-            </a:pPr>
-            <a:r>
-              <a:rPr lang="en-US" sz="1200" b="1" spc="300" kern="0" dirty="0">
-                <a:solidFill>
-                  <a:srgbClr val="F47920"/>
-                </a:solidFill>
-                <a:latin typeface="Trebuchet MS" pitchFamily="34" charset="0"/>
-                <a:ea typeface="Trebuchet MS" pitchFamily="34" charset="-122"/>
-                <a:cs typeface="Trebuchet MS" pitchFamily="34" charset="-120"/>
-              </a:rPr>
-              <a:t>ARCHITECTURE &amp; ATTENTION</a:t>
-            </a:r>
-            <a:endParaRPr lang="en-US" sz="1200" dirty="0"/>
-          </a:p>
-        </p:txBody>
-      </p:sp>
-      <p:sp>
-        <p:nvSpPr>
-          <p:cNvPr id="3" name="Text 1"/>
-          <p:cNvSpPr txBox="1"/>
-          <p:nvPr/>
-        </p:nvSpPr>
-        <p:spPr>
-          <a:xfrm>
-            <a:off x="621792" y="1600200"/>
-            <a:ext cx="6949440" cy="2194560"/>
-          </a:xfrm>
-          <a:prstGeom prst="rect">
-            <a:avLst/>
-          </a:prstGeom>
-          <a:noFill/>
-          <a:ln/>
-        </p:spPr>
-        <p:txBody>
-          <a:bodyPr wrap="square" lIns="0" tIns="0" rIns="0" bIns="0" rtlCol="0" anchor="t"/>
-          <a:lstStyle/>
-          <a:p>
-            <a:pPr indent="0" marL="0">
-              <a:buNone/>
-            </a:pPr>
-            <a:r>
-              <a:rPr lang="en-US" sz="4600" b="1" dirty="0">
-                <a:solidFill>
-                  <a:srgbClr val="FFFFFF"/>
-                </a:solidFill>
-                <a:latin typeface="Georgia" pitchFamily="34" charset="0"/>
-                <a:ea typeface="Georgia" pitchFamily="34" charset="-122"/>
-                <a:cs typeface="Georgia" pitchFamily="34" charset="-120"/>
-              </a:rPr>
-              <a:t>What Would You Build Instead?</a:t>
-            </a:r>
-            <a:endParaRPr lang="en-US" sz="4600" dirty="0"/>
-          </a:p>
-        </p:txBody>
-      </p:sp>
-      <p:sp>
-        <p:nvSpPr>
-          <p:cNvPr id="4" name="Text 2"/>
-          <p:cNvSpPr txBox="1"/>
-          <p:nvPr/>
-        </p:nvSpPr>
-        <p:spPr>
-          <a:xfrm>
-            <a:off x="621792" y="3931920"/>
-            <a:ext cx="7132320" cy="1737360"/>
-          </a:xfrm>
-          <a:prstGeom prst="rect">
-            <a:avLst/>
-          </a:prstGeom>
-          <a:noFill/>
-          <a:ln/>
-        </p:spPr>
-        <p:txBody>
-          <a:bodyPr wrap="square" lIns="0" tIns="0" rIns="0" bIns="0" rtlCol="0" anchor="t"/>
-          <a:lstStyle/>
-          <a:p>
-            <a:pPr indent="0" marL="0">
-              <a:lnSpc>
-                <a:spcPct val="130000"/>
-              </a:lnSpc>
-              <a:buNone/>
-            </a:pPr>
-            <a:r>
-              <a:rPr lang="en-US" sz="1700" dirty="0">
-                <a:solidFill>
-                  <a:srgbClr val="B9C4D0"/>
-                </a:solidFill>
-                <a:latin typeface="Trebuchet MS" pitchFamily="34" charset="0"/>
-                <a:ea typeface="Trebuchet MS" pitchFamily="34" charset="-122"/>
-                <a:cs typeface="Trebuchet MS" pitchFamily="34" charset="-120"/>
-              </a:rPr>
-              <a:t>Almost all the argument about AI is about whether the current approach will reach artificial general intelligence. Very little of it is about whether AGI is the right thing to be aiming at. This is the second question, and it has a better answer.</a:t>
-            </a:r>
-            <a:endParaRPr lang="en-US" sz="1700" dirty="0"/>
-          </a:p>
-        </p:txBody>
-      </p:sp>
       <p:pic>
         <p:nvPicPr>
-          <p:cNvPr id="5" name="brand-mark" descr="/tmp/claude-0/-home-claude/840a28d2-2874-58f2-bea9-3fe61a55262a/scratchpad/ahideck/logo.png">    </p:cNvPr>
+          <p:cNvPr id="7" name="Picture 6" descr="cover_06.jpg"/>
           <p:cNvPicPr>
             <a:picLocks noChangeAspect="1"/>
           </p:cNvPicPr>
           <p:nvPr/>
         </p:nvPicPr>
         <p:blipFill>
-          <a:blip r:embed="rId1"/>
+          <a:blip r:embed="rId4"/>
           <a:stretch>
             <a:fillRect/>
           </a:stretch>
         </p:blipFill>
         <p:spPr>
           <a:xfrm>
-            <a:off x="8641080" y="1920240"/>
-            <a:ext cx="2926080" cy="2926080"/>
+            <a:off x="-18288" y="-18288"/>
+            <a:ext cx="12228545" cy="6894576"/>
           </a:xfrm>
           <a:prstGeom prst="rect">
             <a:avLst/>
           </a:prstGeom>
         </p:spPr>
       </p:pic>
+      <p:sp>
+        <p:nvSpPr>
+          <p:cNvPr id="8" name="Rectangle 7"/>
+          <p:cNvSpPr/>
+          <p:nvPr/>
+        </p:nvSpPr>
+        <p:spPr>
+          <a:xfrm>
+            <a:off x="0" y="0"/>
+            <a:ext cx="12191969" cy="6858000"/>
+          </a:xfrm>
+          <a:prstGeom prst="rect">
+            <a:avLst/>
+          </a:prstGeom>
+          <a:solidFill>
+            <a:srgbClr val="000000">
+              <a:alpha val="20000"/>
+            </a:srgbClr>
+          </a:solidFill>
+          <a:ln>
+            <a:noFill/>
+          </a:ln>
+          <a:effectLst/>
+        </p:spPr>
+        <p:style>
+          <a:lnRef idx="1">
+            <a:schemeClr val="accent1"/>
+          </a:lnRef>
+          <a:fillRef idx="3">
+            <a:schemeClr val="accent1"/>
+          </a:fillRef>
+          <a:effectRef idx="2">
+            <a:schemeClr val="accent1"/>
+          </a:effectRef>
+          <a:fontRef idx="minor">
+            <a:schemeClr val="lt1"/>
+          </a:fontRef>
+        </p:style>
+        <p:txBody>
+          <a:bodyPr rtlCol="0" anchor="ctr"/>
+          <a:lstStyle/>
+          <a:p>
+            <a:pPr algn="ctr"/>
+          </a:p>
+        </p:txBody>
+      </p:sp>
+      <p:sp>
+        <p:nvSpPr>
+          <p:cNvPr id="9" name="Rectangle 8"/>
+          <p:cNvSpPr/>
+          <p:nvPr/>
+        </p:nvSpPr>
+        <p:spPr>
+          <a:xfrm>
+            <a:off x="0" y="0"/>
+            <a:ext cx="12191969" cy="100584"/>
+          </a:xfrm>
+          <a:prstGeom prst="rect">
+            <a:avLst/>
+          </a:prstGeom>
+          <a:solidFill>
+            <a:srgbClr val="F47920"/>
+          </a:solidFill>
+          <a:ln>
+            <a:noFill/>
+          </a:ln>
+          <a:effectLst/>
+        </p:spPr>
+        <p:style>
+          <a:lnRef idx="1">
+            <a:schemeClr val="accent1"/>
+          </a:lnRef>
+          <a:fillRef idx="3">
+            <a:schemeClr val="accent1"/>
+          </a:fillRef>
+          <a:effectRef idx="2">
+            <a:schemeClr val="accent1"/>
+          </a:effectRef>
+          <a:fontRef idx="minor">
+            <a:schemeClr val="lt1"/>
+          </a:fontRef>
+        </p:style>
+        <p:txBody>
+          <a:bodyPr rtlCol="0" anchor="ctr"/>
+          <a:lstStyle/>
+          <a:p>
+            <a:pPr algn="ctr"/>
+          </a:p>
+        </p:txBody>
+      </p:sp>
+      <p:sp>
+        <p:nvSpPr>
+          <p:cNvPr id="2" name="Text 0"/>
+          <p:cNvSpPr txBox="1"/>
+          <p:nvPr/>
+        </p:nvSpPr>
+        <p:spPr>
+          <a:xfrm>
+            <a:off x="621792" y="658368"/>
+            <a:ext cx="6400800" cy="310896"/>
+          </a:xfrm>
+          <a:prstGeom prst="rect">
+            <a:avLst/>
+          </a:prstGeom>
+          <a:noFill/>
+          <a:ln/>
+        </p:spPr>
+        <p:txBody>
+          <a:bodyPr wrap="square" lIns="0" tIns="0" rIns="0" bIns="0" rtlCol="0" anchor="ctr"/>
+          <a:lstStyle/>
+          <a:p>
+            <a:pPr indent="0" marL="0">
+              <a:buNone/>
+            </a:pPr>
+            <a:r>
+              <a:rPr lang="en-US" sz="1200" b="1" spc="300" kern="0" dirty="0">
+                <a:solidFill>
+                  <a:srgbClr val="FFFFFF"/>
+                </a:solidFill>
+                <a:effectLst>
+                  <a:outerShdw blurRad="165100" dist="0" dir="2700000" algn="ctr" rotWithShape="0">
+                    <a:srgbClr val="000000">
+                      <a:alpha val="96000"/>
+                    </a:srgbClr>
+                  </a:outerShdw>
+                </a:effectLst>
+                <a:latin typeface="Trebuchet MS" pitchFamily="34" charset="0"/>
+                <a:ea typeface="Trebuchet MS" pitchFamily="34" charset="-122"/>
+                <a:cs typeface="Trebuchet MS" pitchFamily="34" charset="-120"/>
+              </a:rPr>
+              <a:t>ARCHITECTURE &amp; ATTENTION</a:t>
+            </a:r>
+            <a:endParaRPr lang="en-US" sz="1200" dirty="0"/>
+          </a:p>
+        </p:txBody>
+      </p:sp>
+      <p:sp>
+        <p:nvSpPr>
+          <p:cNvPr id="3" name="Text 1"/>
+          <p:cNvSpPr txBox="1"/>
+          <p:nvPr/>
+        </p:nvSpPr>
+        <p:spPr>
+          <a:xfrm>
+            <a:off x="621792" y="1600200"/>
+            <a:ext cx="10241280" cy="2194560"/>
+          </a:xfrm>
+          <a:prstGeom prst="rect">
+            <a:avLst/>
+          </a:prstGeom>
+          <a:noFill/>
+          <a:ln/>
+        </p:spPr>
+        <p:txBody>
+          <a:bodyPr wrap="square" lIns="0" tIns="0" rIns="0" bIns="0" rtlCol="0" anchor="t"/>
+          <a:lstStyle/>
+          <a:p>
+            <a:pPr indent="0" marL="0">
+              <a:buNone/>
+            </a:pPr>
+            <a:r>
+              <a:rPr lang="en-US" sz="4600" b="1" dirty="0">
+                <a:solidFill>
+                  <a:srgbClr val="FFFFFF"/>
+                </a:solidFill>
+                <a:effectLst>
+                  <a:outerShdw blurRad="254000" dist="0" dir="2700000" algn="ctr" rotWithShape="0">
+                    <a:srgbClr val="000000">
+                      <a:alpha val="92000"/>
+                    </a:srgbClr>
+                  </a:outerShdw>
+                </a:effectLst>
+                <a:latin typeface="Georgia" pitchFamily="34" charset="0"/>
+                <a:ea typeface="Georgia" pitchFamily="34" charset="-122"/>
+                <a:cs typeface="Georgia" pitchFamily="34" charset="-120"/>
+              </a:rPr>
+              <a:t>What Would You Build Instead?</a:t>
+            </a:r>
+            <a:endParaRPr lang="en-US" sz="4600" dirty="0"/>
+          </a:p>
+        </p:txBody>
+      </p:sp>
+      <p:sp>
+        <p:nvSpPr>
+          <p:cNvPr id="4" name="Text 2"/>
+          <p:cNvSpPr txBox="1"/>
+          <p:nvPr/>
+        </p:nvSpPr>
+        <p:spPr>
+          <a:xfrm>
+            <a:off x="621792" y="3931920"/>
+            <a:ext cx="9692640" cy="1737360"/>
+          </a:xfrm>
+          <a:prstGeom prst="rect">
+            <a:avLst/>
+          </a:prstGeom>
+          <a:noFill/>
+          <a:ln/>
+        </p:spPr>
+        <p:txBody>
+          <a:bodyPr wrap="square" lIns="0" tIns="0" rIns="0" bIns="0" rtlCol="0" anchor="t"/>
+          <a:lstStyle/>
+          <a:p>
+            <a:pPr indent="0" marL="0">
+              <a:lnSpc>
+                <a:spcPct val="130000"/>
+              </a:lnSpc>
+              <a:buNone/>
+            </a:pPr>
+            <a:r>
+              <a:rPr lang="en-US" sz="1700" dirty="0">
+                <a:solidFill>
+                  <a:srgbClr val="FFFFFF"/>
+                </a:solidFill>
+                <a:effectLst>
+                  <a:outerShdw blurRad="165100" dist="0" dir="2700000" algn="ctr" rotWithShape="0">
+                    <a:srgbClr val="000000">
+                      <a:alpha val="96000"/>
+                    </a:srgbClr>
+                  </a:outerShdw>
+                </a:effectLst>
+                <a:latin typeface="Trebuchet MS" pitchFamily="34" charset="0"/>
+                <a:ea typeface="Trebuchet MS" pitchFamily="34" charset="-122"/>
+                <a:cs typeface="Trebuchet MS" pitchFamily="34" charset="-120"/>
+              </a:rPr>
+              <a:t>Almost all the argument about AI is about whether the current approach will reach artificial general intelligence. Very little of it is about whether AGI is the right thing to be aiming at. This is the second question, and it has a better answer.</a:t>
+            </a:r>
+            <a:endParaRPr lang="en-US" sz="1700" dirty="0"/>
+          </a:p>
+        </p:txBody>
+      </p:sp>
       <p:sp>
         <p:nvSpPr>
           <p:cNvPr id="6" name="Text 3"/>
@@ -2753,8 +2864,15 @@
             <a:r>
               <a:rPr lang="en-US" sz="1150" dirty="0">
                 <a:solidFill>
-                  <a:srgbClr val="93A3B5"/>
-                </a:solidFill>
+                  <a:srgbClr val="ECE6DF"/>
+                </a:solidFill>
+                <a:effectLst>
+                  <a:outerShdw blurRad="165100" dist="0" dir="2700000" algn="ctr" rotWithShape="0">
+                    <a:srgbClr val="000000">
+                      <a:alpha val="96000"/>
+                    </a:srgbClr>
+                  </a:outerShdw>
+                </a:effectLst>
                 <a:latin typeface="Trebuchet MS" pitchFamily="34" charset="0"/>
                 <a:ea typeface="Trebuchet MS" pitchFamily="34" charset="-122"/>
                 <a:cs typeface="Trebuchet MS" pitchFamily="34" charset="-120"/>
